--- a/ppt/2026-10-19_S6258001_S_LAR96548.pptx
+++ b/ppt/2026-10-19_S6258001_S_LAR96548.pptx
@@ -1855,7 +1855,7 @@
                 <a:ea typeface="Microsoft JhengHei" pitchFamily="34" charset="-122"/>
                 <a:cs typeface="Microsoft JhengHei" pitchFamily="34" charset="-120"/>
               </a:rPr>
-              <a:t>📢 「The new Lipikar Baume AP+Max 72h relief*」417,981（7 個月前）；「New Lipikar Baume AP+Max」230,769（8 個月前）；「How to hydrate my body?</a:t>
+              <a:t>📢 「The new Lipikar Baume AP+Max 72h relief*」417,981（7 個月前）；「New Lipikar Baume AP+Max」230,769（8 個月前）；「How to hydrate my body? ｜ Lipikar AP+Max for Itchy Relief」950（10 個月前）——品牌官方 AP+Max 系列新廣告連發（7-8個月內兩條），主打 72 小時止癢，濕疹／敏感肌季節性需求高</a:t>
             </a:r>
             <a:endParaRPr lang="en-US" sz="950" dirty="0"/>
           </a:p>
